--- a/documentacion/Presentacion Sportech.pptx
+++ b/documentacion/Presentacion Sportech.pptx
@@ -110,6 +110,11 @@
       </a:defRPr>
     </a:lvl9pPr>
   </p:defaultTextStyle>
+  <p:extLst>
+    <p:ext uri="{EFAFB233-063F-42B5-8137-9DF3F51BA10A}">
+      <p15:sldGuideLst xmlns:p15="http://schemas.microsoft.com/office/powerpoint/2012/main"/>
+    </p:ext>
+  </p:extLst>
 </p:presentation>
 </file>
 
@@ -163,7 +168,7 @@
           <a:noFill/>
           <a:extLst>
             <a:ext uri="{909E8E84-426E-40dd-AFC4-6F175D3DCCD1}">
-              <a14:hiddenFill xmlns:a14="http://schemas.microsoft.com/office/drawing/2010/main" xmlns="">
+              <a14:hiddenFill xmlns="" xmlns:a14="http://schemas.microsoft.com/office/drawing/2010/main">
                 <a:solidFill>
                   <a:srgbClr val="FFFFFF"/>
                 </a:solidFill>
@@ -223,7 +228,7 @@
             </a:ln>
             <a:extLst>
               <a:ext uri="{91240B29-F687-4f45-9708-019B960494DF}">
-                <a14:hiddenLine xmlns:a14="http://schemas.microsoft.com/office/drawing/2010/main" xmlns="" w="9525">
+                <a14:hiddenLine xmlns="" xmlns:a14="http://schemas.microsoft.com/office/drawing/2010/main" w="9525">
                   <a:solidFill>
                     <a:srgbClr val="000000"/>
                   </a:solidFill>
@@ -313,7 +318,7 @@
             </a:ln>
             <a:extLst>
               <a:ext uri="{91240B29-F687-4f45-9708-019B960494DF}">
-                <a14:hiddenLine xmlns:a14="http://schemas.microsoft.com/office/drawing/2010/main" xmlns="" w="9525">
+                <a14:hiddenLine xmlns="" xmlns:a14="http://schemas.microsoft.com/office/drawing/2010/main" w="9525">
                   <a:solidFill>
                     <a:srgbClr val="000000"/>
                   </a:solidFill>
@@ -403,7 +408,7 @@
             </a:ln>
             <a:extLst>
               <a:ext uri="{91240B29-F687-4f45-9708-019B960494DF}">
-                <a14:hiddenLine xmlns:a14="http://schemas.microsoft.com/office/drawing/2010/main" xmlns="" w="9525">
+                <a14:hiddenLine xmlns="" xmlns:a14="http://schemas.microsoft.com/office/drawing/2010/main" w="9525">
                   <a:solidFill>
                     <a:srgbClr val="000000"/>
                   </a:solidFill>
@@ -437,7 +442,7 @@
             </a:ln>
             <a:extLst>
               <a:ext uri="{91240B29-F687-4f45-9708-019B960494DF}">
-                <a14:hiddenLine xmlns:a14="http://schemas.microsoft.com/office/drawing/2010/main" xmlns="" w="9525">
+                <a14:hiddenLine xmlns="" xmlns:a14="http://schemas.microsoft.com/office/drawing/2010/main" w="9525">
                   <a:solidFill>
                     <a:srgbClr val="000000"/>
                   </a:solidFill>
@@ -527,7 +532,7 @@
             </a:ln>
             <a:extLst>
               <a:ext uri="{91240B29-F687-4f45-9708-019B960494DF}">
-                <a14:hiddenLine xmlns:a14="http://schemas.microsoft.com/office/drawing/2010/main" xmlns="" w="9525">
+                <a14:hiddenLine xmlns="" xmlns:a14="http://schemas.microsoft.com/office/drawing/2010/main" w="9525">
                   <a:solidFill>
                     <a:srgbClr val="000000"/>
                   </a:solidFill>
@@ -589,7 +594,7 @@
             </a:ln>
             <a:extLst>
               <a:ext uri="{91240B29-F687-4f45-9708-019B960494DF}">
-                <a14:hiddenLine xmlns:a14="http://schemas.microsoft.com/office/drawing/2010/main" xmlns="" w="9525">
+                <a14:hiddenLine xmlns="" xmlns:a14="http://schemas.microsoft.com/office/drawing/2010/main" w="9525">
                   <a:solidFill>
                     <a:srgbClr val="000000"/>
                   </a:solidFill>
@@ -651,7 +656,7 @@
             </a:ln>
             <a:extLst>
               <a:ext uri="{91240B29-F687-4f45-9708-019B960494DF}">
-                <a14:hiddenLine xmlns:a14="http://schemas.microsoft.com/office/drawing/2010/main" xmlns="" w="9525">
+                <a14:hiddenLine xmlns="" xmlns:a14="http://schemas.microsoft.com/office/drawing/2010/main" w="9525">
                   <a:solidFill>
                     <a:srgbClr val="000000"/>
                   </a:solidFill>
@@ -741,7 +746,7 @@
             </a:ln>
             <a:extLst>
               <a:ext uri="{91240B29-F687-4f45-9708-019B960494DF}">
-                <a14:hiddenLine xmlns:a14="http://schemas.microsoft.com/office/drawing/2010/main" xmlns="" w="9525">
+                <a14:hiddenLine xmlns="" xmlns:a14="http://schemas.microsoft.com/office/drawing/2010/main" w="9525">
                   <a:solidFill>
                     <a:srgbClr val="000000"/>
                   </a:solidFill>
@@ -803,7 +808,7 @@
             </a:ln>
             <a:extLst>
               <a:ext uri="{91240B29-F687-4f45-9708-019B960494DF}">
-                <a14:hiddenLine xmlns:a14="http://schemas.microsoft.com/office/drawing/2010/main" xmlns="" w="9525">
+                <a14:hiddenLine xmlns="" xmlns:a14="http://schemas.microsoft.com/office/drawing/2010/main" w="9525">
                   <a:solidFill>
                     <a:srgbClr val="000000"/>
                   </a:solidFill>
@@ -865,7 +870,7 @@
             </a:ln>
             <a:extLst>
               <a:ext uri="{91240B29-F687-4f45-9708-019B960494DF}">
-                <a14:hiddenLine xmlns:a14="http://schemas.microsoft.com/office/drawing/2010/main" xmlns="" w="9525">
+                <a14:hiddenLine xmlns="" xmlns:a14="http://schemas.microsoft.com/office/drawing/2010/main" w="9525">
                   <a:solidFill>
                     <a:srgbClr val="000000"/>
                   </a:solidFill>
@@ -955,7 +960,7 @@
             </a:ln>
             <a:extLst>
               <a:ext uri="{91240B29-F687-4f45-9708-019B960494DF}">
-                <a14:hiddenLine xmlns:a14="http://schemas.microsoft.com/office/drawing/2010/main" xmlns="" w="9525">
+                <a14:hiddenLine xmlns="" xmlns:a14="http://schemas.microsoft.com/office/drawing/2010/main" w="9525">
                   <a:solidFill>
                     <a:srgbClr val="000000"/>
                   </a:solidFill>
@@ -1045,7 +1050,7 @@
             </a:ln>
             <a:extLst>
               <a:ext uri="{91240B29-F687-4f45-9708-019B960494DF}">
-                <a14:hiddenLine xmlns:a14="http://schemas.microsoft.com/office/drawing/2010/main" xmlns="" w="9525">
+                <a14:hiddenLine xmlns="" xmlns:a14="http://schemas.microsoft.com/office/drawing/2010/main" w="9525">
                   <a:solidFill>
                     <a:srgbClr val="000000"/>
                   </a:solidFill>
@@ -1107,7 +1112,7 @@
             </a:ln>
             <a:extLst>
               <a:ext uri="{91240B29-F687-4f45-9708-019B960494DF}">
-                <a14:hiddenLine xmlns:a14="http://schemas.microsoft.com/office/drawing/2010/main" xmlns="" w="9525">
+                <a14:hiddenLine xmlns="" xmlns:a14="http://schemas.microsoft.com/office/drawing/2010/main" w="9525">
                   <a:solidFill>
                     <a:srgbClr val="000000"/>
                   </a:solidFill>
@@ -1217,7 +1222,7 @@
             </a:ln>
             <a:extLst>
               <a:ext uri="{91240B29-F687-4f45-9708-019B960494DF}">
-                <a14:hiddenLine xmlns:a14="http://schemas.microsoft.com/office/drawing/2010/main" xmlns="" w="9525">
+                <a14:hiddenLine xmlns="" xmlns:a14="http://schemas.microsoft.com/office/drawing/2010/main" w="9525">
                   <a:solidFill>
                     <a:srgbClr val="000000"/>
                   </a:solidFill>
@@ -1279,7 +1284,7 @@
             </a:ln>
             <a:extLst>
               <a:ext uri="{91240B29-F687-4f45-9708-019B960494DF}">
-                <a14:hiddenLine xmlns:a14="http://schemas.microsoft.com/office/drawing/2010/main" xmlns="" w="9525">
+                <a14:hiddenLine xmlns="" xmlns:a14="http://schemas.microsoft.com/office/drawing/2010/main" w="9525">
                   <a:solidFill>
                     <a:srgbClr val="000000"/>
                   </a:solidFill>
@@ -1369,7 +1374,7 @@
             </a:ln>
             <a:extLst>
               <a:ext uri="{91240B29-F687-4f45-9708-019B960494DF}">
-                <a14:hiddenLine xmlns:a14="http://schemas.microsoft.com/office/drawing/2010/main" xmlns="" w="9525">
+                <a14:hiddenLine xmlns="" xmlns:a14="http://schemas.microsoft.com/office/drawing/2010/main" w="9525">
                   <a:solidFill>
                     <a:srgbClr val="000000"/>
                   </a:solidFill>
@@ -1459,7 +1464,7 @@
             </a:ln>
             <a:extLst>
               <a:ext uri="{91240B29-F687-4f45-9708-019B960494DF}">
-                <a14:hiddenLine xmlns:a14="http://schemas.microsoft.com/office/drawing/2010/main" xmlns="" w="9525">
+                <a14:hiddenLine xmlns="" xmlns:a14="http://schemas.microsoft.com/office/drawing/2010/main" w="9525">
                   <a:solidFill>
                     <a:srgbClr val="000000"/>
                   </a:solidFill>
@@ -1521,7 +1526,7 @@
             </a:ln>
             <a:extLst>
               <a:ext uri="{91240B29-F687-4f45-9708-019B960494DF}">
-                <a14:hiddenLine xmlns:a14="http://schemas.microsoft.com/office/drawing/2010/main" xmlns="" w="9525">
+                <a14:hiddenLine xmlns="" xmlns:a14="http://schemas.microsoft.com/office/drawing/2010/main" w="9525">
                   <a:solidFill>
                     <a:srgbClr val="000000"/>
                   </a:solidFill>
@@ -1611,7 +1616,7 @@
             </a:ln>
             <a:extLst>
               <a:ext uri="{91240B29-F687-4f45-9708-019B960494DF}">
-                <a14:hiddenLine xmlns:a14="http://schemas.microsoft.com/office/drawing/2010/main" xmlns="" w="9525">
+                <a14:hiddenLine xmlns="" xmlns:a14="http://schemas.microsoft.com/office/drawing/2010/main" w="9525">
                   <a:solidFill>
                     <a:srgbClr val="000000"/>
                   </a:solidFill>
@@ -1701,7 +1706,7 @@
             </a:ln>
             <a:extLst>
               <a:ext uri="{91240B29-F687-4f45-9708-019B960494DF}">
-                <a14:hiddenLine xmlns:a14="http://schemas.microsoft.com/office/drawing/2010/main" xmlns="" w="9525">
+                <a14:hiddenLine xmlns="" xmlns:a14="http://schemas.microsoft.com/office/drawing/2010/main" w="9525">
                   <a:solidFill>
                     <a:srgbClr val="000000"/>
                   </a:solidFill>
@@ -1757,7 +1762,7 @@
             </a:ln>
             <a:extLst>
               <a:ext uri="{91240B29-F687-4f45-9708-019B960494DF}">
-                <a14:hiddenLine xmlns:a14="http://schemas.microsoft.com/office/drawing/2010/main" xmlns="" w="9525">
+                <a14:hiddenLine xmlns="" xmlns:a14="http://schemas.microsoft.com/office/drawing/2010/main" w="9525">
                   <a:solidFill>
                     <a:srgbClr val="000000"/>
                   </a:solidFill>
@@ -1847,7 +1852,7 @@
             </a:ln>
             <a:extLst>
               <a:ext uri="{91240B29-F687-4f45-9708-019B960494DF}">
-                <a14:hiddenLine xmlns:a14="http://schemas.microsoft.com/office/drawing/2010/main" xmlns="" w="9525">
+                <a14:hiddenLine xmlns="" xmlns:a14="http://schemas.microsoft.com/office/drawing/2010/main" w="9525">
                   <a:solidFill>
                     <a:srgbClr val="000000"/>
                   </a:solidFill>
@@ -1903,7 +1908,7 @@
             </a:ln>
             <a:extLst>
               <a:ext uri="{91240B29-F687-4f45-9708-019B960494DF}">
-                <a14:hiddenLine xmlns:a14="http://schemas.microsoft.com/office/drawing/2010/main" xmlns="" w="9525">
+                <a14:hiddenLine xmlns="" xmlns:a14="http://schemas.microsoft.com/office/drawing/2010/main" w="9525">
                   <a:solidFill>
                     <a:srgbClr val="000000"/>
                   </a:solidFill>
@@ -1993,7 +1998,7 @@
             </a:ln>
             <a:extLst>
               <a:ext uri="{91240B29-F687-4f45-9708-019B960494DF}">
-                <a14:hiddenLine xmlns:a14="http://schemas.microsoft.com/office/drawing/2010/main" xmlns="" w="9525">
+                <a14:hiddenLine xmlns="" xmlns:a14="http://schemas.microsoft.com/office/drawing/2010/main" w="9525">
                   <a:solidFill>
                     <a:srgbClr val="000000"/>
                   </a:solidFill>
@@ -2061,7 +2066,7 @@
             </a:ln>
             <a:extLst>
               <a:ext uri="{91240B29-F687-4f45-9708-019B960494DF}">
-                <a14:hiddenLine xmlns:a14="http://schemas.microsoft.com/office/drawing/2010/main" xmlns="" w="9525">
+                <a14:hiddenLine xmlns="" xmlns:a14="http://schemas.microsoft.com/office/drawing/2010/main" w="9525">
                   <a:solidFill>
                     <a:srgbClr val="000000"/>
                   </a:solidFill>
@@ -2151,7 +2156,7 @@
             </a:ln>
             <a:extLst>
               <a:ext uri="{91240B29-F687-4f45-9708-019B960494DF}">
-                <a14:hiddenLine xmlns:a14="http://schemas.microsoft.com/office/drawing/2010/main" xmlns="" w="9525">
+                <a14:hiddenLine xmlns="" xmlns:a14="http://schemas.microsoft.com/office/drawing/2010/main" w="9525">
                   <a:solidFill>
                     <a:srgbClr val="000000"/>
                   </a:solidFill>
@@ -2219,7 +2224,7 @@
             </a:ln>
             <a:extLst>
               <a:ext uri="{91240B29-F687-4f45-9708-019B960494DF}">
-                <a14:hiddenLine xmlns:a14="http://schemas.microsoft.com/office/drawing/2010/main" xmlns="" w="9525">
+                <a14:hiddenLine xmlns="" xmlns:a14="http://schemas.microsoft.com/office/drawing/2010/main" w="9525">
                   <a:solidFill>
                     <a:srgbClr val="000000"/>
                   </a:solidFill>
@@ -2309,7 +2314,7 @@
             </a:ln>
             <a:extLst>
               <a:ext uri="{91240B29-F687-4f45-9708-019B960494DF}">
-                <a14:hiddenLine xmlns:a14="http://schemas.microsoft.com/office/drawing/2010/main" xmlns="" w="9525">
+                <a14:hiddenLine xmlns="" xmlns:a14="http://schemas.microsoft.com/office/drawing/2010/main" w="9525">
                   <a:solidFill>
                     <a:srgbClr val="000000"/>
                   </a:solidFill>
@@ -2343,7 +2348,7 @@
             </a:ln>
             <a:extLst>
               <a:ext uri="{91240B29-F687-4f45-9708-019B960494DF}">
-                <a14:hiddenLine xmlns:a14="http://schemas.microsoft.com/office/drawing/2010/main" xmlns="" w="9525">
+                <a14:hiddenLine xmlns="" xmlns:a14="http://schemas.microsoft.com/office/drawing/2010/main" w="9525">
                   <a:solidFill>
                     <a:srgbClr val="000000"/>
                   </a:solidFill>
@@ -2433,7 +2438,7 @@
             </a:ln>
             <a:extLst>
               <a:ext uri="{91240B29-F687-4f45-9708-019B960494DF}">
-                <a14:hiddenLine xmlns:a14="http://schemas.microsoft.com/office/drawing/2010/main" xmlns="" w="9525">
+                <a14:hiddenLine xmlns="" xmlns:a14="http://schemas.microsoft.com/office/drawing/2010/main" w="9525">
                   <a:solidFill>
                     <a:srgbClr val="000000"/>
                   </a:solidFill>
@@ -2495,7 +2500,7 @@
             </a:ln>
             <a:extLst>
               <a:ext uri="{91240B29-F687-4f45-9708-019B960494DF}">
-                <a14:hiddenLine xmlns:a14="http://schemas.microsoft.com/office/drawing/2010/main" xmlns="" w="9525">
+                <a14:hiddenLine xmlns="" xmlns:a14="http://schemas.microsoft.com/office/drawing/2010/main" w="9525">
                   <a:solidFill>
                     <a:srgbClr val="000000"/>
                   </a:solidFill>
@@ -2557,7 +2562,7 @@
             </a:ln>
             <a:extLst>
               <a:ext uri="{91240B29-F687-4f45-9708-019B960494DF}">
-                <a14:hiddenLine xmlns:a14="http://schemas.microsoft.com/office/drawing/2010/main" xmlns="" w="9525">
+                <a14:hiddenLine xmlns="" xmlns:a14="http://schemas.microsoft.com/office/drawing/2010/main" w="9525">
                   <a:solidFill>
                     <a:srgbClr val="000000"/>
                   </a:solidFill>
@@ -2647,7 +2652,7 @@
             </a:ln>
             <a:extLst>
               <a:ext uri="{91240B29-F687-4f45-9708-019B960494DF}">
-                <a14:hiddenLine xmlns:a14="http://schemas.microsoft.com/office/drawing/2010/main" xmlns="" w="9525">
+                <a14:hiddenLine xmlns="" xmlns:a14="http://schemas.microsoft.com/office/drawing/2010/main" w="9525">
                   <a:solidFill>
                     <a:srgbClr val="000000"/>
                   </a:solidFill>
@@ -2715,7 +2720,7 @@
             </a:ln>
             <a:extLst>
               <a:ext uri="{91240B29-F687-4f45-9708-019B960494DF}">
-                <a14:hiddenLine xmlns:a14="http://schemas.microsoft.com/office/drawing/2010/main" xmlns="" w="9525">
+                <a14:hiddenLine xmlns="" xmlns:a14="http://schemas.microsoft.com/office/drawing/2010/main" w="9525">
                   <a:solidFill>
                     <a:srgbClr val="000000"/>
                   </a:solidFill>
@@ -2777,7 +2782,7 @@
             </a:ln>
             <a:extLst>
               <a:ext uri="{91240B29-F687-4f45-9708-019B960494DF}">
-                <a14:hiddenLine xmlns:a14="http://schemas.microsoft.com/office/drawing/2010/main" xmlns="" w="9525">
+                <a14:hiddenLine xmlns="" xmlns:a14="http://schemas.microsoft.com/office/drawing/2010/main" w="9525">
                   <a:solidFill>
                     <a:srgbClr val="000000"/>
                   </a:solidFill>
@@ -2867,7 +2872,7 @@
             </a:ln>
             <a:extLst>
               <a:ext uri="{91240B29-F687-4f45-9708-019B960494DF}">
-                <a14:hiddenLine xmlns:a14="http://schemas.microsoft.com/office/drawing/2010/main" xmlns="" w="9525">
+                <a14:hiddenLine xmlns="" xmlns:a14="http://schemas.microsoft.com/office/drawing/2010/main" w="9525">
                   <a:solidFill>
                     <a:srgbClr val="000000"/>
                   </a:solidFill>
@@ -2929,7 +2934,7 @@
             </a:ln>
             <a:extLst>
               <a:ext uri="{91240B29-F687-4f45-9708-019B960494DF}">
-                <a14:hiddenLine xmlns:a14="http://schemas.microsoft.com/office/drawing/2010/main" xmlns="" w="9525">
+                <a14:hiddenLine xmlns="" xmlns:a14="http://schemas.microsoft.com/office/drawing/2010/main" w="9525">
                   <a:solidFill>
                     <a:srgbClr val="000000"/>
                   </a:solidFill>
@@ -3019,7 +3024,7 @@
             </a:ln>
             <a:extLst>
               <a:ext uri="{91240B29-F687-4f45-9708-019B960494DF}">
-                <a14:hiddenLine xmlns:a14="http://schemas.microsoft.com/office/drawing/2010/main" xmlns="" w="9525">
+                <a14:hiddenLine xmlns="" xmlns:a14="http://schemas.microsoft.com/office/drawing/2010/main" w="9525">
                   <a:solidFill>
                     <a:srgbClr val="000000"/>
                   </a:solidFill>
@@ -3081,7 +3086,7 @@
             </a:ln>
             <a:extLst>
               <a:ext uri="{91240B29-F687-4f45-9708-019B960494DF}">
-                <a14:hiddenLine xmlns:a14="http://schemas.microsoft.com/office/drawing/2010/main" xmlns="" w="9525">
+                <a14:hiddenLine xmlns="" xmlns:a14="http://schemas.microsoft.com/office/drawing/2010/main" w="9525">
                   <a:solidFill>
                     <a:srgbClr val="000000"/>
                   </a:solidFill>
@@ -3171,7 +3176,7 @@
             </a:ln>
             <a:extLst>
               <a:ext uri="{91240B29-F687-4f45-9708-019B960494DF}">
-                <a14:hiddenLine xmlns:a14="http://schemas.microsoft.com/office/drawing/2010/main" xmlns="" w="9525">
+                <a14:hiddenLine xmlns="" xmlns:a14="http://schemas.microsoft.com/office/drawing/2010/main" w="9525">
                   <a:solidFill>
                     <a:srgbClr val="000000"/>
                   </a:solidFill>
@@ -3205,7 +3210,7 @@
             </a:ln>
             <a:extLst>
               <a:ext uri="{91240B29-F687-4f45-9708-019B960494DF}">
-                <a14:hiddenLine xmlns:a14="http://schemas.microsoft.com/office/drawing/2010/main" xmlns="" w="9525">
+                <a14:hiddenLine xmlns="" xmlns:a14="http://schemas.microsoft.com/office/drawing/2010/main" w="9525">
                   <a:solidFill>
                     <a:srgbClr val="000000"/>
                   </a:solidFill>
@@ -3270,7 +3275,7 @@
             </a:ln>
             <a:extLst>
               <a:ext uri="{91240B29-F687-4f45-9708-019B960494DF}">
-                <a14:hiddenLine xmlns:a14="http://schemas.microsoft.com/office/drawing/2010/main" xmlns="" w="9525">
+                <a14:hiddenLine xmlns="" xmlns:a14="http://schemas.microsoft.com/office/drawing/2010/main" w="9525">
                   <a:solidFill>
                     <a:srgbClr val="000000"/>
                   </a:solidFill>
@@ -3360,7 +3365,7 @@
             </a:ln>
             <a:extLst>
               <a:ext uri="{91240B29-F687-4f45-9708-019B960494DF}">
-                <a14:hiddenLine xmlns:a14="http://schemas.microsoft.com/office/drawing/2010/main" xmlns="" w="9525">
+                <a14:hiddenLine xmlns="" xmlns:a14="http://schemas.microsoft.com/office/drawing/2010/main" w="9525">
                   <a:solidFill>
                     <a:srgbClr val="000000"/>
                   </a:solidFill>
@@ -3422,7 +3427,7 @@
             </a:ln>
             <a:extLst>
               <a:ext uri="{91240B29-F687-4f45-9708-019B960494DF}">
-                <a14:hiddenLine xmlns:a14="http://schemas.microsoft.com/office/drawing/2010/main" xmlns="" w="9525">
+                <a14:hiddenLine xmlns="" xmlns:a14="http://schemas.microsoft.com/office/drawing/2010/main" w="9525">
                   <a:solidFill>
                     <a:srgbClr val="000000"/>
                   </a:solidFill>
@@ -3512,7 +3517,7 @@
             </a:ln>
             <a:extLst>
               <a:ext uri="{91240B29-F687-4f45-9708-019B960494DF}">
-                <a14:hiddenLine xmlns:a14="http://schemas.microsoft.com/office/drawing/2010/main" xmlns="" w="9525">
+                <a14:hiddenLine xmlns="" xmlns:a14="http://schemas.microsoft.com/office/drawing/2010/main" w="9525">
                   <a:solidFill>
                     <a:srgbClr val="000000"/>
                   </a:solidFill>
@@ -3602,7 +3607,7 @@
             </a:ln>
             <a:extLst>
               <a:ext uri="{91240B29-F687-4f45-9708-019B960494DF}">
-                <a14:hiddenLine xmlns:a14="http://schemas.microsoft.com/office/drawing/2010/main" xmlns="" w="9525">
+                <a14:hiddenLine xmlns="" xmlns:a14="http://schemas.microsoft.com/office/drawing/2010/main" w="9525">
                   <a:solidFill>
                     <a:srgbClr val="000000"/>
                   </a:solidFill>
@@ -3667,7 +3672,7 @@
             </a:ln>
             <a:extLst>
               <a:ext uri="{91240B29-F687-4f45-9708-019B960494DF}">
-                <a14:hiddenLine xmlns:a14="http://schemas.microsoft.com/office/drawing/2010/main" xmlns="" w="9525">
+                <a14:hiddenLine xmlns="" xmlns:a14="http://schemas.microsoft.com/office/drawing/2010/main" w="9525">
                   <a:solidFill>
                     <a:srgbClr val="000000"/>
                   </a:solidFill>
@@ -3729,7 +3734,7 @@
             </a:ln>
             <a:extLst>
               <a:ext uri="{91240B29-F687-4f45-9708-019B960494DF}">
-                <a14:hiddenLine xmlns:a14="http://schemas.microsoft.com/office/drawing/2010/main" xmlns="" w="9525">
+                <a14:hiddenLine xmlns="" xmlns:a14="http://schemas.microsoft.com/office/drawing/2010/main" w="9525">
                   <a:solidFill>
                     <a:srgbClr val="000000"/>
                   </a:solidFill>
@@ -3819,7 +3824,7 @@
             </a:ln>
             <a:extLst>
               <a:ext uri="{91240B29-F687-4f45-9708-019B960494DF}">
-                <a14:hiddenLine xmlns:a14="http://schemas.microsoft.com/office/drawing/2010/main" xmlns="" w="9525">
+                <a14:hiddenLine xmlns="" xmlns:a14="http://schemas.microsoft.com/office/drawing/2010/main" w="9525">
                   <a:solidFill>
                     <a:srgbClr val="000000"/>
                   </a:solidFill>
@@ -3909,7 +3914,7 @@
             </a:ln>
             <a:extLst>
               <a:ext uri="{91240B29-F687-4f45-9708-019B960494DF}">
-                <a14:hiddenLine xmlns:a14="http://schemas.microsoft.com/office/drawing/2010/main" xmlns="" w="9525">
+                <a14:hiddenLine xmlns="" xmlns:a14="http://schemas.microsoft.com/office/drawing/2010/main" w="9525">
                   <a:solidFill>
                     <a:srgbClr val="000000"/>
                   </a:solidFill>
@@ -3971,7 +3976,7 @@
             </a:ln>
             <a:extLst>
               <a:ext uri="{91240B29-F687-4f45-9708-019B960494DF}">
-                <a14:hiddenLine xmlns:a14="http://schemas.microsoft.com/office/drawing/2010/main" xmlns="" w="9525">
+                <a14:hiddenLine xmlns="" xmlns:a14="http://schemas.microsoft.com/office/drawing/2010/main" w="9525">
                   <a:solidFill>
                     <a:srgbClr val="000000"/>
                   </a:solidFill>
@@ -4091,7 +4096,7 @@
             </a:ln>
             <a:extLst>
               <a:ext uri="{91240B29-F687-4f45-9708-019B960494DF}">
-                <a14:hiddenLine xmlns:a14="http://schemas.microsoft.com/office/drawing/2010/main" xmlns="" w="9525">
+                <a14:hiddenLine xmlns="" xmlns:a14="http://schemas.microsoft.com/office/drawing/2010/main" w="9525">
                   <a:solidFill>
                     <a:srgbClr val="000000"/>
                   </a:solidFill>
@@ -4159,7 +4164,7 @@
             </a:ln>
             <a:extLst>
               <a:ext uri="{91240B29-F687-4f45-9708-019B960494DF}">
-                <a14:hiddenLine xmlns:a14="http://schemas.microsoft.com/office/drawing/2010/main" xmlns="" w="9525">
+                <a14:hiddenLine xmlns="" xmlns:a14="http://schemas.microsoft.com/office/drawing/2010/main" w="9525">
                   <a:solidFill>
                     <a:srgbClr val="000000"/>
                   </a:solidFill>
@@ -4249,7 +4254,7 @@
             </a:ln>
             <a:extLst>
               <a:ext uri="{91240B29-F687-4f45-9708-019B960494DF}">
-                <a14:hiddenLine xmlns:a14="http://schemas.microsoft.com/office/drawing/2010/main" xmlns="" w="9525">
+                <a14:hiddenLine xmlns="" xmlns:a14="http://schemas.microsoft.com/office/drawing/2010/main" w="9525">
                   <a:solidFill>
                     <a:srgbClr val="000000"/>
                   </a:solidFill>
@@ -9056,7 +9061,7 @@
           <a:noFill/>
           <a:extLst>
             <a:ext uri="{909E8E84-426E-40dd-AFC4-6F175D3DCCD1}">
-              <a14:hiddenFill xmlns:a14="http://schemas.microsoft.com/office/drawing/2010/main" xmlns="">
+              <a14:hiddenFill xmlns="" xmlns:a14="http://schemas.microsoft.com/office/drawing/2010/main">
                 <a:solidFill>
                   <a:srgbClr val="FFFFFF"/>
                 </a:solidFill>
@@ -9130,7 +9135,7 @@
               </a:ln>
               <a:extLst>
                 <a:ext uri="{91240B29-F687-4f45-9708-019B960494DF}">
-                  <a14:hiddenLine xmlns:a14="http://schemas.microsoft.com/office/drawing/2010/main" xmlns="" w="9525">
+                  <a14:hiddenLine xmlns="" xmlns:a14="http://schemas.microsoft.com/office/drawing/2010/main" w="9525">
                     <a:solidFill>
                       <a:srgbClr val="000000"/>
                     </a:solidFill>
@@ -9220,7 +9225,7 @@
               </a:ln>
               <a:extLst>
                 <a:ext uri="{91240B29-F687-4f45-9708-019B960494DF}">
-                  <a14:hiddenLine xmlns:a14="http://schemas.microsoft.com/office/drawing/2010/main" xmlns="" w="9525">
+                  <a14:hiddenLine xmlns="" xmlns:a14="http://schemas.microsoft.com/office/drawing/2010/main" w="9525">
                     <a:solidFill>
                       <a:srgbClr val="000000"/>
                     </a:solidFill>
@@ -9310,7 +9315,7 @@
               </a:ln>
               <a:extLst>
                 <a:ext uri="{91240B29-F687-4f45-9708-019B960494DF}">
-                  <a14:hiddenLine xmlns:a14="http://schemas.microsoft.com/office/drawing/2010/main" xmlns="" w="9525">
+                  <a14:hiddenLine xmlns="" xmlns:a14="http://schemas.microsoft.com/office/drawing/2010/main" w="9525">
                     <a:solidFill>
                       <a:srgbClr val="000000"/>
                     </a:solidFill>
@@ -9372,7 +9377,7 @@
               </a:ln>
               <a:extLst>
                 <a:ext uri="{91240B29-F687-4f45-9708-019B960494DF}">
-                  <a14:hiddenLine xmlns:a14="http://schemas.microsoft.com/office/drawing/2010/main" xmlns="" w="9525">
+                  <a14:hiddenLine xmlns="" xmlns:a14="http://schemas.microsoft.com/office/drawing/2010/main" w="9525">
                     <a:solidFill>
                       <a:srgbClr val="000000"/>
                     </a:solidFill>
@@ -9462,7 +9467,7 @@
               </a:ln>
               <a:extLst>
                 <a:ext uri="{91240B29-F687-4f45-9708-019B960494DF}">
-                  <a14:hiddenLine xmlns:a14="http://schemas.microsoft.com/office/drawing/2010/main" xmlns="" w="9525">
+                  <a14:hiddenLine xmlns="" xmlns:a14="http://schemas.microsoft.com/office/drawing/2010/main" w="9525">
                     <a:solidFill>
                       <a:srgbClr val="000000"/>
                     </a:solidFill>
@@ -9524,7 +9529,7 @@
               </a:ln>
               <a:extLst>
                 <a:ext uri="{91240B29-F687-4f45-9708-019B960494DF}">
-                  <a14:hiddenLine xmlns:a14="http://schemas.microsoft.com/office/drawing/2010/main" xmlns="" w="9525">
+                  <a14:hiddenLine xmlns="" xmlns:a14="http://schemas.microsoft.com/office/drawing/2010/main" w="9525">
                     <a:solidFill>
                       <a:srgbClr val="000000"/>
                     </a:solidFill>
@@ -9586,7 +9591,7 @@
               </a:ln>
               <a:extLst>
                 <a:ext uri="{91240B29-F687-4f45-9708-019B960494DF}">
-                  <a14:hiddenLine xmlns:a14="http://schemas.microsoft.com/office/drawing/2010/main" xmlns="" w="9525">
+                  <a14:hiddenLine xmlns="" xmlns:a14="http://schemas.microsoft.com/office/drawing/2010/main" w="9525">
                     <a:solidFill>
                       <a:srgbClr val="000000"/>
                     </a:solidFill>
@@ -9676,7 +9681,7 @@
               </a:ln>
               <a:extLst>
                 <a:ext uri="{91240B29-F687-4f45-9708-019B960494DF}">
-                  <a14:hiddenLine xmlns:a14="http://schemas.microsoft.com/office/drawing/2010/main" xmlns="" w="9525">
+                  <a14:hiddenLine xmlns="" xmlns:a14="http://schemas.microsoft.com/office/drawing/2010/main" w="9525">
                     <a:solidFill>
                       <a:srgbClr val="000000"/>
                     </a:solidFill>
@@ -9766,7 +9771,7 @@
               </a:ln>
               <a:extLst>
                 <a:ext uri="{91240B29-F687-4f45-9708-019B960494DF}">
-                  <a14:hiddenLine xmlns:a14="http://schemas.microsoft.com/office/drawing/2010/main" xmlns="" w="9525">
+                  <a14:hiddenLine xmlns="" xmlns:a14="http://schemas.microsoft.com/office/drawing/2010/main" w="9525">
                     <a:solidFill>
                       <a:srgbClr val="000000"/>
                     </a:solidFill>
@@ -9828,7 +9833,7 @@
               </a:ln>
               <a:extLst>
                 <a:ext uri="{91240B29-F687-4f45-9708-019B960494DF}">
-                  <a14:hiddenLine xmlns:a14="http://schemas.microsoft.com/office/drawing/2010/main" xmlns="" w="9525">
+                  <a14:hiddenLine xmlns="" xmlns:a14="http://schemas.microsoft.com/office/drawing/2010/main" w="9525">
                     <a:solidFill>
                       <a:srgbClr val="000000"/>
                     </a:solidFill>
@@ -9938,7 +9943,7 @@
               </a:ln>
               <a:extLst>
                 <a:ext uri="{91240B29-F687-4f45-9708-019B960494DF}">
-                  <a14:hiddenLine xmlns:a14="http://schemas.microsoft.com/office/drawing/2010/main" xmlns="" w="9525">
+                  <a14:hiddenLine xmlns="" xmlns:a14="http://schemas.microsoft.com/office/drawing/2010/main" w="9525">
                     <a:solidFill>
                       <a:srgbClr val="000000"/>
                     </a:solidFill>
@@ -10022,7 +10027,7 @@
               </a:ln>
               <a:extLst>
                 <a:ext uri="{91240B29-F687-4f45-9708-019B960494DF}">
-                  <a14:hiddenLine xmlns:a14="http://schemas.microsoft.com/office/drawing/2010/main" xmlns="" w="9525">
+                  <a14:hiddenLine xmlns="" xmlns:a14="http://schemas.microsoft.com/office/drawing/2010/main" w="9525">
                     <a:solidFill>
                       <a:srgbClr val="000000"/>
                     </a:solidFill>
@@ -10084,7 +10089,7 @@
               </a:ln>
               <a:extLst>
                 <a:ext uri="{91240B29-F687-4f45-9708-019B960494DF}">
-                  <a14:hiddenLine xmlns:a14="http://schemas.microsoft.com/office/drawing/2010/main" xmlns="" w="9525">
+                  <a14:hiddenLine xmlns="" xmlns:a14="http://schemas.microsoft.com/office/drawing/2010/main" w="9525">
                     <a:solidFill>
                       <a:srgbClr val="000000"/>
                     </a:solidFill>
@@ -10146,7 +10151,7 @@
               </a:ln>
               <a:extLst>
                 <a:ext uri="{91240B29-F687-4f45-9708-019B960494DF}">
-                  <a14:hiddenLine xmlns:a14="http://schemas.microsoft.com/office/drawing/2010/main" xmlns="" w="9525">
+                  <a14:hiddenLine xmlns="" xmlns:a14="http://schemas.microsoft.com/office/drawing/2010/main" w="9525">
                     <a:solidFill>
                       <a:srgbClr val="000000"/>
                     </a:solidFill>
@@ -10236,7 +10241,7 @@
               </a:ln>
               <a:extLst>
                 <a:ext uri="{91240B29-F687-4f45-9708-019B960494DF}">
-                  <a14:hiddenLine xmlns:a14="http://schemas.microsoft.com/office/drawing/2010/main" xmlns="" w="9525">
+                  <a14:hiddenLine xmlns="" xmlns:a14="http://schemas.microsoft.com/office/drawing/2010/main" w="9525">
                     <a:solidFill>
                       <a:srgbClr val="000000"/>
                     </a:solidFill>
@@ -10270,7 +10275,7 @@
               </a:ln>
               <a:extLst>
                 <a:ext uri="{91240B29-F687-4f45-9708-019B960494DF}">
-                  <a14:hiddenLine xmlns:a14="http://schemas.microsoft.com/office/drawing/2010/main" xmlns="" w="9525">
+                  <a14:hiddenLine xmlns="" xmlns:a14="http://schemas.microsoft.com/office/drawing/2010/main" w="9525">
                     <a:solidFill>
                       <a:srgbClr val="000000"/>
                     </a:solidFill>
@@ -10335,7 +10340,7 @@
               </a:ln>
               <a:extLst>
                 <a:ext uri="{91240B29-F687-4f45-9708-019B960494DF}">
-                  <a14:hiddenLine xmlns:a14="http://schemas.microsoft.com/office/drawing/2010/main" xmlns="" w="9525">
+                  <a14:hiddenLine xmlns="" xmlns:a14="http://schemas.microsoft.com/office/drawing/2010/main" w="9525">
                     <a:solidFill>
                       <a:srgbClr val="000000"/>
                     </a:solidFill>
@@ -10425,7 +10430,7 @@
               </a:ln>
               <a:extLst>
                 <a:ext uri="{91240B29-F687-4f45-9708-019B960494DF}">
-                  <a14:hiddenLine xmlns:a14="http://schemas.microsoft.com/office/drawing/2010/main" xmlns="" w="9525">
+                  <a14:hiddenLine xmlns="" xmlns:a14="http://schemas.microsoft.com/office/drawing/2010/main" w="9525">
                     <a:solidFill>
                       <a:srgbClr val="000000"/>
                     </a:solidFill>
@@ -10487,7 +10492,7 @@
               </a:ln>
               <a:extLst>
                 <a:ext uri="{91240B29-F687-4f45-9708-019B960494DF}">
-                  <a14:hiddenLine xmlns:a14="http://schemas.microsoft.com/office/drawing/2010/main" xmlns="" w="9525">
+                  <a14:hiddenLine xmlns="" xmlns:a14="http://schemas.microsoft.com/office/drawing/2010/main" w="9525">
                     <a:solidFill>
                       <a:srgbClr val="000000"/>
                     </a:solidFill>
@@ -10577,7 +10582,7 @@
               </a:ln>
               <a:extLst>
                 <a:ext uri="{91240B29-F687-4f45-9708-019B960494DF}">
-                  <a14:hiddenLine xmlns:a14="http://schemas.microsoft.com/office/drawing/2010/main" xmlns="" w="9525">
+                  <a14:hiddenLine xmlns="" xmlns:a14="http://schemas.microsoft.com/office/drawing/2010/main" w="9525">
                     <a:solidFill>
                       <a:srgbClr val="000000"/>
                     </a:solidFill>
@@ -10642,7 +10647,7 @@
               </a:ln>
               <a:extLst>
                 <a:ext uri="{91240B29-F687-4f45-9708-019B960494DF}">
-                  <a14:hiddenLine xmlns:a14="http://schemas.microsoft.com/office/drawing/2010/main" xmlns="" w="9525">
+                  <a14:hiddenLine xmlns="" xmlns:a14="http://schemas.microsoft.com/office/drawing/2010/main" w="9525">
                     <a:solidFill>
                       <a:srgbClr val="000000"/>
                     </a:solidFill>
@@ -10704,7 +10709,7 @@
               </a:ln>
               <a:extLst>
                 <a:ext uri="{91240B29-F687-4f45-9708-019B960494DF}">
-                  <a14:hiddenLine xmlns:a14="http://schemas.microsoft.com/office/drawing/2010/main" xmlns="" w="9525">
+                  <a14:hiddenLine xmlns="" xmlns:a14="http://schemas.microsoft.com/office/drawing/2010/main" w="9525">
                     <a:solidFill>
                       <a:srgbClr val="000000"/>
                     </a:solidFill>
@@ -10794,7 +10799,7 @@
               </a:ln>
               <a:extLst>
                 <a:ext uri="{91240B29-F687-4f45-9708-019B960494DF}">
-                  <a14:hiddenLine xmlns:a14="http://schemas.microsoft.com/office/drawing/2010/main" xmlns="" w="9525">
+                  <a14:hiddenLine xmlns="" xmlns:a14="http://schemas.microsoft.com/office/drawing/2010/main" w="9525">
                     <a:solidFill>
                       <a:srgbClr val="000000"/>
                     </a:solidFill>
@@ -10884,7 +10889,7 @@
               </a:ln>
               <a:extLst>
                 <a:ext uri="{91240B29-F687-4f45-9708-019B960494DF}">
-                  <a14:hiddenLine xmlns:a14="http://schemas.microsoft.com/office/drawing/2010/main" xmlns="" w="9525">
+                  <a14:hiddenLine xmlns="" xmlns:a14="http://schemas.microsoft.com/office/drawing/2010/main" w="9525">
                     <a:solidFill>
                       <a:srgbClr val="000000"/>
                     </a:solidFill>
@@ -10949,7 +10954,7 @@
               </a:ln>
               <a:extLst>
                 <a:ext uri="{91240B29-F687-4f45-9708-019B960494DF}">
-                  <a14:hiddenLine xmlns:a14="http://schemas.microsoft.com/office/drawing/2010/main" xmlns="" w="9525">
+                  <a14:hiddenLine xmlns="" xmlns:a14="http://schemas.microsoft.com/office/drawing/2010/main" w="9525">
                     <a:solidFill>
                       <a:srgbClr val="000000"/>
                     </a:solidFill>
@@ -11069,7 +11074,7 @@
               </a:ln>
               <a:extLst>
                 <a:ext uri="{91240B29-F687-4f45-9708-019B960494DF}">
-                  <a14:hiddenLine xmlns:a14="http://schemas.microsoft.com/office/drawing/2010/main" xmlns="" w="9525">
+                  <a14:hiddenLine xmlns="" xmlns:a14="http://schemas.microsoft.com/office/drawing/2010/main" w="9525">
                     <a:solidFill>
                       <a:srgbClr val="000000"/>
                     </a:solidFill>
@@ -11167,7 +11172,7 @@
               </a:ln>
               <a:extLst>
                 <a:ext uri="{91240B29-F687-4f45-9708-019B960494DF}">
-                  <a14:hiddenLine xmlns:a14="http://schemas.microsoft.com/office/drawing/2010/main" xmlns="" w="9525">
+                  <a14:hiddenLine xmlns="" xmlns:a14="http://schemas.microsoft.com/office/drawing/2010/main" w="9525">
                     <a:solidFill>
                       <a:srgbClr val="000000"/>
                     </a:solidFill>
@@ -11282,7 +11287,7 @@
               </a:ln>
               <a:extLst>
                 <a:ext uri="{91240B29-F687-4f45-9708-019B960494DF}">
-                  <a14:hiddenLine xmlns:a14="http://schemas.microsoft.com/office/drawing/2010/main" xmlns="" w="9525">
+                  <a14:hiddenLine xmlns="" xmlns:a14="http://schemas.microsoft.com/office/drawing/2010/main" w="9525">
                     <a:solidFill>
                       <a:srgbClr val="000000"/>
                     </a:solidFill>
@@ -11372,7 +11377,7 @@
               </a:ln>
               <a:extLst>
                 <a:ext uri="{91240B29-F687-4f45-9708-019B960494DF}">
-                  <a14:hiddenLine xmlns:a14="http://schemas.microsoft.com/office/drawing/2010/main" xmlns="" w="9525">
+                  <a14:hiddenLine xmlns="" xmlns:a14="http://schemas.microsoft.com/office/drawing/2010/main" w="9525">
                     <a:solidFill>
                       <a:srgbClr val="000000"/>
                     </a:solidFill>
@@ -11437,7 +11442,7 @@
               </a:ln>
               <a:extLst>
                 <a:ext uri="{91240B29-F687-4f45-9708-019B960494DF}">
-                  <a14:hiddenLine xmlns:a14="http://schemas.microsoft.com/office/drawing/2010/main" xmlns="" w="9525">
+                  <a14:hiddenLine xmlns="" xmlns:a14="http://schemas.microsoft.com/office/drawing/2010/main" w="9525">
                     <a:solidFill>
                       <a:srgbClr val="000000"/>
                     </a:solidFill>
@@ -11527,7 +11532,7 @@
               </a:ln>
               <a:extLst>
                 <a:ext uri="{91240B29-F687-4f45-9708-019B960494DF}">
-                  <a14:hiddenLine xmlns:a14="http://schemas.microsoft.com/office/drawing/2010/main" xmlns="" w="9525">
+                  <a14:hiddenLine xmlns="" xmlns:a14="http://schemas.microsoft.com/office/drawing/2010/main" w="9525">
                     <a:solidFill>
                       <a:srgbClr val="000000"/>
                     </a:solidFill>
@@ -11595,7 +11600,7 @@
               </a:ln>
               <a:extLst>
                 <a:ext uri="{91240B29-F687-4f45-9708-019B960494DF}">
-                  <a14:hiddenLine xmlns:a14="http://schemas.microsoft.com/office/drawing/2010/main" xmlns="" w="9525">
+                  <a14:hiddenLine xmlns="" xmlns:a14="http://schemas.microsoft.com/office/drawing/2010/main" w="9525">
                     <a:solidFill>
                       <a:srgbClr val="000000"/>
                     </a:solidFill>
@@ -11685,7 +11690,7 @@
               </a:ln>
               <a:extLst>
                 <a:ext uri="{91240B29-F687-4f45-9708-019B960494DF}">
-                  <a14:hiddenLine xmlns:a14="http://schemas.microsoft.com/office/drawing/2010/main" xmlns="" w="9525">
+                  <a14:hiddenLine xmlns="" xmlns:a14="http://schemas.microsoft.com/office/drawing/2010/main" w="9525">
                     <a:solidFill>
                       <a:srgbClr val="000000"/>
                     </a:solidFill>
@@ -11753,7 +11758,7 @@
               </a:ln>
               <a:extLst>
                 <a:ext uri="{91240B29-F687-4f45-9708-019B960494DF}">
-                  <a14:hiddenLine xmlns:a14="http://schemas.microsoft.com/office/drawing/2010/main" xmlns="" w="9525">
+                  <a14:hiddenLine xmlns="" xmlns:a14="http://schemas.microsoft.com/office/drawing/2010/main" w="9525">
                     <a:solidFill>
                       <a:srgbClr val="000000"/>
                     </a:solidFill>
@@ -11843,7 +11848,7 @@
               </a:ln>
               <a:extLst>
                 <a:ext uri="{91240B29-F687-4f45-9708-019B960494DF}">
-                  <a14:hiddenLine xmlns:a14="http://schemas.microsoft.com/office/drawing/2010/main" xmlns="" w="9525">
+                  <a14:hiddenLine xmlns="" xmlns:a14="http://schemas.microsoft.com/office/drawing/2010/main" w="9525">
                     <a:solidFill>
                       <a:srgbClr val="000000"/>
                     </a:solidFill>
@@ -11877,7 +11882,7 @@
               </a:ln>
               <a:extLst>
                 <a:ext uri="{91240B29-F687-4f45-9708-019B960494DF}">
-                  <a14:hiddenLine xmlns:a14="http://schemas.microsoft.com/office/drawing/2010/main" xmlns="" w="9525">
+                  <a14:hiddenLine xmlns="" xmlns:a14="http://schemas.microsoft.com/office/drawing/2010/main" w="9525">
                     <a:solidFill>
                       <a:srgbClr val="000000"/>
                     </a:solidFill>
@@ -14537,6 +14542,76 @@
           <a:chExt cx="0" cy="0"/>
         </a:xfrm>
       </p:grpSpPr>
+      <p:pic>
+        <p:nvPicPr>
+          <p:cNvPr id="1026" name="Picture 2" descr="Imagen generada">
+            <a:extLst>
+              <a:ext uri="{FF2B5EF4-FFF2-40B4-BE49-F238E27FC236}">
+                <a16:creationId xmlns:a16="http://schemas.microsoft.com/office/drawing/2014/main" id="{105FC845-C9E7-030A-A4F9-DE3AEDB1CE95}"/>
+              </a:ext>
+            </a:extLst>
+          </p:cNvPr>
+          <p:cNvPicPr>
+            <a:picLocks noChangeAspect="1" noChangeArrowheads="1"/>
+          </p:cNvPicPr>
+          <p:nvPr/>
+        </p:nvPicPr>
+        <p:blipFill>
+          <a:blip r:embed="rId2">
+            <a:extLst>
+              <a:ext uri="{28A0092B-C50C-407E-A947-70E740481C1C}">
+                <a14:useLocalDpi xmlns:a14="http://schemas.microsoft.com/office/drawing/2010/main" val="0"/>
+              </a:ext>
+            </a:extLst>
+          </a:blip>
+          <a:srcRect/>
+          <a:stretch>
+            <a:fillRect/>
+          </a:stretch>
+        </p:blipFill>
+        <p:spPr bwMode="auto">
+          <a:xfrm>
+            <a:off x="3455483" y="648651"/>
+            <a:ext cx="5560697" cy="5560697"/>
+          </a:xfrm>
+          <a:prstGeom prst="roundRect">
+            <a:avLst>
+              <a:gd name="adj" fmla="val 16667"/>
+            </a:avLst>
+          </a:prstGeom>
+          <a:ln>
+            <a:noFill/>
+          </a:ln>
+          <a:effectLst>
+            <a:outerShdw blurRad="76200" dist="38100" dir="7800000" algn="tl" rotWithShape="0">
+              <a:srgbClr val="000000">
+                <a:alpha val="40000"/>
+              </a:srgbClr>
+            </a:outerShdw>
+          </a:effectLst>
+          <a:scene3d>
+            <a:camera prst="orthographicFront"/>
+            <a:lightRig rig="contrasting" dir="t">
+              <a:rot lat="0" lon="0" rev="4200000"/>
+            </a:lightRig>
+          </a:scene3d>
+          <a:sp3d prstMaterial="plastic">
+            <a:bevelT w="381000" h="114300" prst="relaxedInset"/>
+            <a:contourClr>
+              <a:srgbClr val="969696"/>
+            </a:contourClr>
+          </a:sp3d>
+          <a:extLst>
+            <a:ext uri="{909E8E84-426E-40DD-AFC4-6F175D3DCCD1}">
+              <a14:hiddenFill xmlns:a14="http://schemas.microsoft.com/office/drawing/2010/main">
+                <a:solidFill>
+                  <a:srgbClr val="FFFFFF"/>
+                </a:solidFill>
+              </a14:hiddenFill>
+            </a:ext>
+          </a:extLst>
+        </p:spPr>
+      </p:pic>
       <p:sp>
         <p:nvSpPr>
           <p:cNvPr id="2" name="Título 1">
@@ -14553,13 +14628,27 @@
             <p:ph type="title"/>
           </p:nvPr>
         </p:nvSpPr>
-        <p:spPr/>
+        <p:spPr>
+          <a:xfrm>
+            <a:off x="4268071" y="904567"/>
+            <a:ext cx="3401090" cy="717755"/>
+          </a:xfrm>
+          <a:solidFill>
+            <a:schemeClr val="tx1">
+              <a:lumMod val="95000"/>
+            </a:schemeClr>
+          </a:solidFill>
+        </p:spPr>
         <p:txBody>
           <a:bodyPr/>
           <a:lstStyle/>
           <a:p>
             <a:r>
-              <a:rPr lang="es-ES" dirty="0"/>
+              <a:rPr lang="es-ES" b="1" dirty="0">
+                <a:solidFill>
+                  <a:schemeClr val="bg1"/>
+                </a:solidFill>
+              </a:rPr>
               <a:t>Instalación</a:t>
             </a:r>
           </a:p>
@@ -14567,59 +14656,334 @@
       </p:sp>
       <p:sp>
         <p:nvSpPr>
-          <p:cNvPr id="3" name="Marcador de contenido 2">
+          <p:cNvPr id="5" name="CuadroTexto 4">
             <a:extLst>
               <a:ext uri="{FF2B5EF4-FFF2-40B4-BE49-F238E27FC236}">
-                <a16:creationId xmlns:a16="http://schemas.microsoft.com/office/drawing/2014/main" id="{85553158-0EAA-21F3-9F7D-135744D19774}"/>
+                <a16:creationId xmlns:a16="http://schemas.microsoft.com/office/drawing/2014/main" id="{332580E0-DE24-C1A0-E287-95DD558C91D2}"/>
               </a:ext>
             </a:extLst>
           </p:cNvPr>
-          <p:cNvSpPr>
-            <a:spLocks noGrp="1"/>
-          </p:cNvSpPr>
-          <p:nvPr>
-            <p:ph idx="1"/>
-          </p:nvPr>
+          <p:cNvSpPr txBox="1"/>
+          <p:nvPr/>
         </p:nvSpPr>
-        <p:spPr/>
+        <p:spPr>
+          <a:xfrm>
+            <a:off x="3962400" y="3959801"/>
+            <a:ext cx="5053780" cy="338554"/>
+          </a:xfrm>
+          <a:prstGeom prst="rect">
+            <a:avLst/>
+          </a:prstGeom>
+          <a:solidFill>
+            <a:schemeClr val="tx1">
+              <a:lumMod val="95000"/>
+            </a:schemeClr>
+          </a:solidFill>
+        </p:spPr>
         <p:txBody>
-          <a:bodyPr/>
+          <a:bodyPr wrap="square">
+            <a:spAutoFit/>
+          </a:bodyPr>
           <a:lstStyle/>
           <a:p>
             <a:r>
-              <a:rPr lang="es-ES" b="1" dirty="0"/>
-              <a:t>🛠 Requisitos</a:t>
-            </a:r>
-          </a:p>
-          <a:p>
-            <a:r>
-              <a:rPr lang="es-ES" dirty="0"/>
-              <a:t>Java 17+</a:t>
-            </a:r>
-          </a:p>
-          <a:p>
-            <a:r>
-              <a:rPr lang="es-ES" dirty="0"/>
-              <a:t>Node.js 18+</a:t>
-            </a:r>
-          </a:p>
-          <a:p>
-            <a:r>
-              <a:rPr lang="es-ES" dirty="0"/>
-              <a:t>MySQL 8.x</a:t>
-            </a:r>
-          </a:p>
-          <a:p>
-            <a:r>
-              <a:rPr lang="es-ES" dirty="0"/>
-              <a:t>Angular CLI</a:t>
-            </a:r>
-          </a:p>
-          <a:p>
-            <a:endParaRPr lang="es-ES" dirty="0"/>
+              <a:rPr lang="es-ES" sz="1600" i="1" dirty="0" err="1">
+                <a:solidFill>
+                  <a:schemeClr val="bg1">
+                    <a:lumMod val="85000"/>
+                    <a:lumOff val="15000"/>
+                  </a:schemeClr>
+                </a:solidFill>
+              </a:rPr>
+              <a:t>git</a:t>
+            </a:r>
+            <a:r>
+              <a:rPr lang="es-ES" sz="1600" i="1" dirty="0">
+                <a:solidFill>
+                  <a:schemeClr val="bg1">
+                    <a:lumMod val="85000"/>
+                    <a:lumOff val="15000"/>
+                  </a:schemeClr>
+                </a:solidFill>
+              </a:rPr>
+              <a:t> clone https://https://github.com/Jsobrino98/SportTech</a:t>
+            </a:r>
           </a:p>
         </p:txBody>
       </p:sp>
+      <p:sp>
+        <p:nvSpPr>
+          <p:cNvPr id="6" name="CuadroTexto 5">
+            <a:extLst>
+              <a:ext uri="{FF2B5EF4-FFF2-40B4-BE49-F238E27FC236}">
+                <a16:creationId xmlns:a16="http://schemas.microsoft.com/office/drawing/2014/main" id="{E43F328B-5E8B-3AD5-C452-B3E4324A7099}"/>
+              </a:ext>
+            </a:extLst>
+          </p:cNvPr>
+          <p:cNvSpPr txBox="1"/>
+          <p:nvPr/>
+        </p:nvSpPr>
+        <p:spPr>
+          <a:xfrm>
+            <a:off x="3962400" y="4544118"/>
+            <a:ext cx="5053780" cy="338554"/>
+          </a:xfrm>
+          <a:prstGeom prst="rect">
+            <a:avLst/>
+          </a:prstGeom>
+          <a:solidFill>
+            <a:schemeClr val="tx1">
+              <a:lumMod val="95000"/>
+            </a:schemeClr>
+          </a:solidFill>
+        </p:spPr>
+        <p:txBody>
+          <a:bodyPr wrap="square">
+            <a:spAutoFit/>
+          </a:bodyPr>
+          <a:lstStyle/>
+          <a:p>
+            <a:r>
+              <a:rPr lang="es-ES" sz="1600" i="1" dirty="0" err="1">
+                <a:solidFill>
+                  <a:schemeClr val="bg1">
+                    <a:lumMod val="85000"/>
+                    <a:lumOff val="15000"/>
+                  </a:schemeClr>
+                </a:solidFill>
+              </a:rPr>
+              <a:t>Executar</a:t>
+            </a:r>
+            <a:r>
+              <a:rPr lang="es-ES" sz="1600" i="1" dirty="0">
+                <a:solidFill>
+                  <a:schemeClr val="bg1">
+                    <a:lumMod val="85000"/>
+                    <a:lumOff val="15000"/>
+                  </a:schemeClr>
+                </a:solidFill>
+              </a:rPr>
+              <a:t> o script SQL da carpeta despliegue</a:t>
+            </a:r>
+          </a:p>
+        </p:txBody>
+      </p:sp>
+      <p:sp>
+        <p:nvSpPr>
+          <p:cNvPr id="7" name="CuadroTexto 6">
+            <a:extLst>
+              <a:ext uri="{FF2B5EF4-FFF2-40B4-BE49-F238E27FC236}">
+                <a16:creationId xmlns:a16="http://schemas.microsoft.com/office/drawing/2014/main" id="{A3A7B125-6189-B675-3C39-EC983D9C7F03}"/>
+              </a:ext>
+            </a:extLst>
+          </p:cNvPr>
+          <p:cNvSpPr txBox="1"/>
+          <p:nvPr/>
+        </p:nvSpPr>
+        <p:spPr>
+          <a:xfrm>
+            <a:off x="3962400" y="5073739"/>
+            <a:ext cx="5053780" cy="338554"/>
+          </a:xfrm>
+          <a:prstGeom prst="rect">
+            <a:avLst/>
+          </a:prstGeom>
+          <a:solidFill>
+            <a:schemeClr val="tx1">
+              <a:lumMod val="95000"/>
+            </a:schemeClr>
+          </a:solidFill>
+        </p:spPr>
+        <p:txBody>
+          <a:bodyPr wrap="square">
+            <a:spAutoFit/>
+          </a:bodyPr>
+          <a:lstStyle/>
+          <a:p>
+            <a:r>
+              <a:rPr lang="es-ES" sz="1600" i="1" dirty="0" err="1">
+                <a:solidFill>
+                  <a:schemeClr val="bg1">
+                    <a:lumMod val="85000"/>
+                    <a:lumOff val="15000"/>
+                  </a:schemeClr>
+                </a:solidFill>
+              </a:rPr>
+              <a:t>Executar</a:t>
+            </a:r>
+            <a:r>
+              <a:rPr lang="es-ES" sz="1600" i="1" dirty="0">
+                <a:solidFill>
+                  <a:schemeClr val="bg1">
+                    <a:lumMod val="85000"/>
+                    <a:lumOff val="15000"/>
+                  </a:schemeClr>
+                </a:solidFill>
+              </a:rPr>
+              <a:t> ‘LanzarAplicacion.bat’ (lanza o </a:t>
+            </a:r>
+            <a:r>
+              <a:rPr lang="es-ES" sz="1600" i="1" dirty="0" err="1">
+                <a:solidFill>
+                  <a:schemeClr val="bg1">
+                    <a:lumMod val="85000"/>
+                    <a:lumOff val="15000"/>
+                  </a:schemeClr>
+                </a:solidFill>
+              </a:rPr>
+              <a:t>jar</a:t>
+            </a:r>
+            <a:r>
+              <a:rPr lang="es-ES" sz="1600" i="1" dirty="0">
+                <a:solidFill>
+                  <a:schemeClr val="bg1">
+                    <a:lumMod val="85000"/>
+                    <a:lumOff val="15000"/>
+                  </a:schemeClr>
+                </a:solidFill>
+              </a:rPr>
+              <a:t> do </a:t>
+            </a:r>
+            <a:r>
+              <a:rPr lang="es-ES" sz="1600" i="1" dirty="0" err="1">
+                <a:solidFill>
+                  <a:schemeClr val="bg1">
+                    <a:lumMod val="85000"/>
+                    <a:lumOff val="15000"/>
+                  </a:schemeClr>
+                </a:solidFill>
+              </a:rPr>
+              <a:t>backend</a:t>
+            </a:r>
+            <a:r>
+              <a:rPr lang="es-ES" sz="1600" i="1" dirty="0">
+                <a:solidFill>
+                  <a:schemeClr val="bg1">
+                    <a:lumMod val="85000"/>
+                    <a:lumOff val="15000"/>
+                  </a:schemeClr>
+                </a:solidFill>
+              </a:rPr>
+              <a:t>)</a:t>
+            </a:r>
+          </a:p>
+        </p:txBody>
+      </p:sp>
+      <p:sp>
+        <p:nvSpPr>
+          <p:cNvPr id="8" name="CuadroTexto 7">
+            <a:extLst>
+              <a:ext uri="{FF2B5EF4-FFF2-40B4-BE49-F238E27FC236}">
+                <a16:creationId xmlns:a16="http://schemas.microsoft.com/office/drawing/2014/main" id="{5447D42E-5822-5125-795B-598C1A6BC5BC}"/>
+              </a:ext>
+            </a:extLst>
+          </p:cNvPr>
+          <p:cNvSpPr txBox="1"/>
+          <p:nvPr/>
+        </p:nvSpPr>
+        <p:spPr>
+          <a:xfrm>
+            <a:off x="4023360" y="5614879"/>
+            <a:ext cx="3403600" cy="338554"/>
+          </a:xfrm>
+          <a:prstGeom prst="rect">
+            <a:avLst/>
+          </a:prstGeom>
+          <a:solidFill>
+            <a:schemeClr val="tx1">
+              <a:lumMod val="95000"/>
+            </a:schemeClr>
+          </a:solidFill>
+        </p:spPr>
+        <p:txBody>
+          <a:bodyPr wrap="square">
+            <a:spAutoFit/>
+          </a:bodyPr>
+          <a:lstStyle/>
+          <a:p>
+            <a:r>
+              <a:rPr lang="es-ES" sz="1600" i="1" dirty="0" err="1">
+                <a:solidFill>
+                  <a:schemeClr val="bg1">
+                    <a:lumMod val="85000"/>
+                    <a:lumOff val="15000"/>
+                  </a:schemeClr>
+                </a:solidFill>
+              </a:rPr>
+              <a:t>npm</a:t>
+            </a:r>
+            <a:r>
+              <a:rPr lang="es-ES" sz="1600" i="1" dirty="0">
+                <a:solidFill>
+                  <a:schemeClr val="bg1">
+                    <a:lumMod val="85000"/>
+                    <a:lumOff val="15000"/>
+                  </a:schemeClr>
+                </a:solidFill>
+              </a:rPr>
+              <a:t> </a:t>
+            </a:r>
+            <a:r>
+              <a:rPr lang="es-ES" sz="1600" i="1" dirty="0" err="1">
+                <a:solidFill>
+                  <a:schemeClr val="bg1">
+                    <a:lumMod val="85000"/>
+                    <a:lumOff val="15000"/>
+                  </a:schemeClr>
+                </a:solidFill>
+              </a:rPr>
+              <a:t>install</a:t>
+            </a:r>
+            <a:r>
+              <a:rPr lang="es-ES" sz="1600" i="1" dirty="0">
+                <a:solidFill>
+                  <a:schemeClr val="bg1">
+                    <a:lumMod val="85000"/>
+                    <a:lumOff val="15000"/>
+                  </a:schemeClr>
+                </a:solidFill>
+              </a:rPr>
+              <a:t>                   ng serve -o</a:t>
+            </a:r>
+          </a:p>
+        </p:txBody>
+      </p:sp>
+      <p:pic>
+        <p:nvPicPr>
+          <p:cNvPr id="10" name="Imagen 9" descr="Icono&#10;&#10;El contenido generado por IA puede ser incorrecto.">
+            <a:extLst>
+              <a:ext uri="{FF2B5EF4-FFF2-40B4-BE49-F238E27FC236}">
+                <a16:creationId xmlns:a16="http://schemas.microsoft.com/office/drawing/2014/main" id="{3C32A73C-CD07-B792-B967-0566C76DFD77}"/>
+              </a:ext>
+            </a:extLst>
+          </p:cNvPr>
+          <p:cNvPicPr>
+            <a:picLocks noChangeAspect="1"/>
+          </p:cNvPicPr>
+          <p:nvPr/>
+        </p:nvPicPr>
+        <p:blipFill>
+          <a:blip r:embed="rId3">
+            <a:extLst>
+              <a:ext uri="{28A0092B-C50C-407E-A947-70E740481C1C}">
+                <a14:useLocalDpi xmlns:a14="http://schemas.microsoft.com/office/drawing/2010/main" val="0"/>
+              </a:ext>
+            </a:extLst>
+          </a:blip>
+          <a:stretch>
+            <a:fillRect/>
+          </a:stretch>
+        </p:blipFill>
+        <p:spPr>
+          <a:xfrm>
+            <a:off x="3762277" y="2872740"/>
+            <a:ext cx="400245" cy="421005"/>
+          </a:xfrm>
+          <a:prstGeom prst="rect">
+            <a:avLst/>
+          </a:prstGeom>
+        </p:spPr>
+      </p:pic>
     </p:spTree>
     <p:extLst>
       <p:ext uri="{BB962C8B-B14F-4D97-AF65-F5344CB8AC3E}">
@@ -14723,7 +15087,15 @@
             </a:r>
             <a:r>
               <a:rPr lang="pt-BR" dirty="0"/>
-              <a:t>estatísticas em tempo real, app móbil e </a:t>
+              <a:t>estatísticas </a:t>
+            </a:r>
+            <a:r>
+              <a:rPr lang="pt-BR" dirty="0" err="1"/>
+              <a:t>en</a:t>
+            </a:r>
+            <a:r>
+              <a:rPr lang="pt-BR" dirty="0"/>
+              <a:t> tempo real, app móbil e </a:t>
             </a:r>
             <a:r>
               <a:rPr lang="pt-BR" dirty="0" err="1"/>
